--- a/slides/iwbis_channel_aware_backdoor.pptx
+++ b/slides/iwbis_channel_aware_backdoor.pptx
@@ -4622,7 +4622,7 @@
                 <a:gridCol w="1645920"/>
                 <a:gridCol w="1645920"/>
               </a:tblGrid>
-              <a:tr h="384048">
+              <a:tr h="512064">
                 <a:tc>
                   <a:txBody>
                     <a:bodyPr/>
@@ -4896,7 +4896,7 @@
                   </a:tcPr>
                 </a:tc>
               </a:tr>
-              <a:tr h="384048">
+              <a:tr h="512064">
                 <a:tc>
                   <a:txBody>
                     <a:bodyPr/>
@@ -5170,7 +5170,7 @@
                   </a:tcPr>
                 </a:tc>
               </a:tr>
-              <a:tr h="384048">
+              <a:tr h="512064">
                 <a:tc>
                   <a:txBody>
                     <a:bodyPr/>
@@ -5444,7 +5444,7 @@
                   </a:tcPr>
                 </a:tc>
               </a:tr>
-              <a:tr h="384048">
+              <a:tr h="512064">
                 <a:tc>
                   <a:txBody>
                     <a:bodyPr/>
@@ -5718,7 +5718,7 @@
                   </a:tcPr>
                 </a:tc>
               </a:tr>
-              <a:tr h="384048">
+              <a:tr h="512064">
                 <a:tc>
                   <a:txBody>
                     <a:bodyPr/>
@@ -5992,7 +5992,7 @@
                   </a:tcPr>
                 </a:tc>
               </a:tr>
-              <a:tr h="384048">
+              <a:tr h="512064">
                 <a:tc>
                   <a:txBody>
                     <a:bodyPr/>
@@ -6278,8 +6278,8 @@
         </p:nvSpPr>
         <p:spPr>
           <a:xfrm>
-            <a:off x="8503920" y="1783080"/>
-            <a:ext cx="3017520" cy="2103120"/>
+            <a:off x="8503920" y="1828800"/>
+            <a:ext cx="3017520" cy="2286000"/>
           </a:xfrm>
           <a:prstGeom prst="rect">
             <a:avLst/>
@@ -6293,12 +6293,12 @@
           <a:p>
             <a:pPr indent="0" marL="0">
               <a:lnSpc>
-                <a:spcPts val="1800"/>
+                <a:spcPts val="1900"/>
               </a:lnSpc>
               <a:buNone/>
             </a:pPr>
             <a:r>
-              <a:rPr lang="en-US" sz="1300" dirty="0">
+              <a:rPr lang="en-US" sz="1350" dirty="0">
                 <a:solidFill>
                   <a:srgbClr val="1B2A41"/>
                 </a:solidFill>
@@ -6308,7 +6308,7 @@
               </a:rPr>
               <a:t>Multi-Krum is the only defense that moved the attack at all, so it is the one carried to the multi-seed stage — even though under blue/fusion it too leaves the backdoor at 15 of 15.</a:t>
             </a:r>
-            <a:endParaRPr lang="en-US" sz="1300" dirty="0"/>
+            <a:endParaRPr lang="en-US" sz="1350" dirty="0"/>
           </a:p>
         </p:txBody>
       </p:sp>
@@ -6320,7 +6320,7 @@
         </p:nvSpPr>
         <p:spPr>
           <a:xfrm>
-            <a:off x="640080" y="4526280"/>
+            <a:off x="640080" y="5257800"/>
             <a:ext cx="10881360" cy="640080"/>
           </a:xfrm>
           <a:prstGeom prst="rect">
@@ -8102,7 +8102,7 @@
                 <a:gridCol w="1097280"/>
                 <a:gridCol w="2011680"/>
               </a:tblGrid>
-              <a:tr h="329184">
+              <a:tr h="457200">
                 <a:tc>
                   <a:txBody>
                     <a:bodyPr/>
@@ -8376,7 +8376,7 @@
                   </a:tcPr>
                 </a:tc>
               </a:tr>
-              <a:tr h="329184">
+              <a:tr h="457200">
                 <a:tc>
                   <a:txBody>
                     <a:bodyPr/>
@@ -8650,7 +8650,7 @@
                   </a:tcPr>
                 </a:tc>
               </a:tr>
-              <a:tr h="329184">
+              <a:tr h="457200">
                 <a:tc>
                   <a:txBody>
                     <a:bodyPr/>
@@ -8924,7 +8924,7 @@
                   </a:tcPr>
                 </a:tc>
               </a:tr>
-              <a:tr h="329184">
+              <a:tr h="457200">
                 <a:tc>
                   <a:txBody>
                     <a:bodyPr/>
@@ -9198,7 +9198,7 @@
                   </a:tcPr>
                 </a:tc>
               </a:tr>
-              <a:tr h="329184">
+              <a:tr h="457200">
                 <a:tc>
                   <a:txBody>
                     <a:bodyPr/>
@@ -9472,7 +9472,7 @@
                   </a:tcPr>
                 </a:tc>
               </a:tr>
-              <a:tr h="329184">
+              <a:tr h="457200">
                 <a:tc>
                   <a:txBody>
                     <a:bodyPr/>
@@ -9746,7 +9746,7 @@
                   </a:tcPr>
                 </a:tc>
               </a:tr>
-              <a:tr h="329184">
+              <a:tr h="457200">
                 <a:tc>
                   <a:txBody>
                     <a:bodyPr/>
@@ -10033,11 +10033,11 @@
         <p:spPr>
           <a:xfrm>
             <a:off x="8321040" y="1737360"/>
-            <a:ext cx="3200400" cy="1188720"/>
+            <a:ext cx="3200400" cy="1280160"/>
           </a:xfrm>
           <a:prstGeom prst="roundRect">
             <a:avLst>
-              <a:gd name="adj" fmla="val 4615"/>
+              <a:gd name="adj" fmla="val 4286"/>
             </a:avLst>
           </a:prstGeom>
           <a:solidFill>
@@ -10054,7 +10054,7 @@
         </p:nvSpPr>
         <p:spPr>
           <a:xfrm>
-            <a:off x="8549640" y="1920240"/>
+            <a:off x="8549640" y="1965960"/>
             <a:ext cx="2743200" cy="384048"/>
           </a:xfrm>
           <a:prstGeom prst="rect">
@@ -10093,7 +10093,7 @@
         </p:nvSpPr>
         <p:spPr>
           <a:xfrm>
-            <a:off x="8549640" y="2322576"/>
+            <a:off x="8549640" y="2377440"/>
             <a:ext cx="2743200" cy="365760"/>
           </a:xfrm>
           <a:prstGeom prst="rect">
@@ -10135,8 +10135,8 @@
         </p:nvSpPr>
         <p:spPr>
           <a:xfrm>
-            <a:off x="8321040" y="3154680"/>
-            <a:ext cx="3200400" cy="1920240"/>
+            <a:off x="8321040" y="3291840"/>
+            <a:ext cx="3200400" cy="2011680"/>
           </a:xfrm>
           <a:prstGeom prst="rect">
             <a:avLst/>
@@ -10159,7 +10159,7 @@
               <a:buChar char="•"/>
             </a:pPr>
             <a:r>
-              <a:rPr lang="en-US" sz="1200" dirty="0">
+              <a:rPr lang="en-US" sz="1250" dirty="0">
                 <a:solidFill>
                   <a:srgbClr val="1B2A41"/>
                 </a:solidFill>
@@ -10169,7 +10169,7 @@
               </a:rPr>
               <a:t>With f = 1 and |S| = 2 of five clients, the poisoned update is not an outlier in parameter space.</a:t>
             </a:r>
-            <a:endParaRPr lang="en-US" sz="1200" dirty="0"/>
+            <a:endParaRPr lang="en-US" sz="1250" dirty="0"/>
           </a:p>
           <a:p>
             <a:pPr marL="342900" indent="-342900">
@@ -10180,7 +10180,7 @@
               <a:buChar char="•"/>
             </a:pPr>
             <a:r>
-              <a:rPr lang="en-US" sz="1200" dirty="0">
+              <a:rPr lang="en-US" sz="1250" dirty="0">
                 <a:solidFill>
                   <a:srgbClr val="1B2A41"/>
                 </a:solidFill>
@@ -10190,7 +10190,7 @@
               </a:rPr>
               <a:t>Surviving selection is close to a coin flip, and the attacker only has to win often enough.</a:t>
             </a:r>
-            <a:endParaRPr lang="en-US" sz="1200" dirty="0"/>
+            <a:endParaRPr lang="en-US" sz="1250" dirty="0"/>
           </a:p>
         </p:txBody>
       </p:sp>
@@ -10202,7 +10202,7 @@
         </p:nvSpPr>
         <p:spPr>
           <a:xfrm>
-            <a:off x="640080" y="5394960"/>
+            <a:off x="640080" y="5532120"/>
             <a:ext cx="10881360" cy="640080"/>
           </a:xfrm>
           <a:prstGeom prst="rect">
@@ -10859,8 +10859,8 @@
         </p:nvSpPr>
         <p:spPr>
           <a:xfrm>
-            <a:off x="640080" y="2057400"/>
-            <a:ext cx="5303520" cy="3017520"/>
+            <a:off x="640080" y="2103120"/>
+            <a:ext cx="5303520" cy="3291840"/>
           </a:xfrm>
           <a:prstGeom prst="rect">
             <a:avLst/>
@@ -10883,7 +10883,7 @@
               <a:buChar char="•"/>
             </a:pPr>
             <a:r>
-              <a:rPr lang="en-US" sz="1350" dirty="0">
+              <a:rPr lang="en-US" sz="1450" dirty="0">
                 <a:solidFill>
                   <a:srgbClr val="1B2A41"/>
                 </a:solidFill>
@@ -10893,7 +10893,7 @@
               </a:rPr>
               <a:t>Blue/fusion and full-RGB triggers reach 15 of 15 across three seeds, with clean performance close to the baseline.</a:t>
             </a:r>
-            <a:endParaRPr lang="en-US" sz="1350" dirty="0"/>
+            <a:endParaRPr lang="en-US" sz="1450" dirty="0"/>
           </a:p>
           <a:p>
             <a:pPr marL="342900" indent="-342900">
@@ -10907,7 +10907,7 @@
               <a:buChar char="•"/>
             </a:pPr>
             <a:r>
-              <a:rPr lang="en-US" sz="1350" dirty="0">
+              <a:rPr lang="en-US" sz="1450" dirty="0">
                 <a:solidFill>
                   <a:srgbClr val="1B2A41"/>
                 </a:solidFill>
@@ -10917,7 +10917,7 @@
               </a:rPr>
               <a:t>In seven of the eight trigger controls the target rate is identical with and without the trigger, so the effect comes from poisoning.</a:t>
             </a:r>
-            <a:endParaRPr lang="en-US" sz="1350" dirty="0"/>
+            <a:endParaRPr lang="en-US" sz="1450" dirty="0"/>
           </a:p>
           <a:p>
             <a:pPr marL="342900" indent="-342900">
@@ -10928,7 +10928,7 @@
               <a:buChar char="•"/>
             </a:pPr>
             <a:r>
-              <a:rPr lang="en-US" sz="1350" dirty="0">
+              <a:rPr lang="en-US" sz="1450" dirty="0">
                 <a:solidFill>
                   <a:srgbClr val="1B2A41"/>
                 </a:solidFill>
@@ -10938,7 +10938,7 @@
               </a:rPr>
               <a:t>Multi-Krum reduces the attack bimodally rather than partially, leaving it fully effective on one of the three seeds for each trigger.</a:t>
             </a:r>
-            <a:endParaRPr lang="en-US" sz="1350" dirty="0"/>
+            <a:endParaRPr lang="en-US" sz="1450" dirty="0"/>
           </a:p>
         </p:txBody>
       </p:sp>
@@ -10989,7 +10989,7 @@
         </p:nvSpPr>
         <p:spPr>
           <a:xfrm>
-            <a:off x="6492240" y="2112264"/>
+            <a:off x="6492240" y="2157984"/>
             <a:ext cx="201168" cy="201168"/>
           </a:xfrm>
           <a:prstGeom prst="rect">
@@ -11009,7 +11009,7 @@
         </p:nvSpPr>
         <p:spPr>
           <a:xfrm>
-            <a:off x="6858000" y="2057400"/>
+            <a:off x="6858000" y="2103120"/>
             <a:ext cx="4663440" cy="274320"/>
           </a:xfrm>
           <a:prstGeom prst="rect">
@@ -11048,7 +11048,7 @@
         </p:nvSpPr>
         <p:spPr>
           <a:xfrm>
-            <a:off x="6858000" y="2331720"/>
+            <a:off x="6858000" y="2377440"/>
             <a:ext cx="4663440" cy="411480"/>
           </a:xfrm>
           <a:prstGeom prst="rect">
@@ -11090,7 +11090,7 @@
         </p:nvSpPr>
         <p:spPr>
           <a:xfrm>
-            <a:off x="6492240" y="2871216"/>
+            <a:off x="6492240" y="3026664"/>
             <a:ext cx="201168" cy="201168"/>
           </a:xfrm>
           <a:prstGeom prst="rect">
@@ -11110,7 +11110,7 @@
         </p:nvSpPr>
         <p:spPr>
           <a:xfrm>
-            <a:off x="6858000" y="2816352"/>
+            <a:off x="6858000" y="2971800"/>
             <a:ext cx="4663440" cy="274320"/>
           </a:xfrm>
           <a:prstGeom prst="rect">
@@ -11149,7 +11149,7 @@
         </p:nvSpPr>
         <p:spPr>
           <a:xfrm>
-            <a:off x="6858000" y="3090672"/>
+            <a:off x="6858000" y="3246120"/>
             <a:ext cx="4663440" cy="411480"/>
           </a:xfrm>
           <a:prstGeom prst="rect">
@@ -11191,7 +11191,7 @@
         </p:nvSpPr>
         <p:spPr>
           <a:xfrm>
-            <a:off x="6492240" y="3630168"/>
+            <a:off x="6492240" y="3895344"/>
             <a:ext cx="201168" cy="201168"/>
           </a:xfrm>
           <a:prstGeom prst="rect">
@@ -11211,7 +11211,7 @@
         </p:nvSpPr>
         <p:spPr>
           <a:xfrm>
-            <a:off x="6858000" y="3575304"/>
+            <a:off x="6858000" y="3840480"/>
             <a:ext cx="4663440" cy="274320"/>
           </a:xfrm>
           <a:prstGeom prst="rect">
@@ -11250,7 +11250,7 @@
         </p:nvSpPr>
         <p:spPr>
           <a:xfrm>
-            <a:off x="6858000" y="3849624"/>
+            <a:off x="6858000" y="4114800"/>
             <a:ext cx="4663440" cy="411480"/>
           </a:xfrm>
           <a:prstGeom prst="rect">
@@ -11292,7 +11292,7 @@
         </p:nvSpPr>
         <p:spPr>
           <a:xfrm>
-            <a:off x="6492240" y="4389120"/>
+            <a:off x="6492240" y="4764024"/>
             <a:ext cx="201168" cy="201168"/>
           </a:xfrm>
           <a:prstGeom prst="rect">
@@ -11312,7 +11312,7 @@
         </p:nvSpPr>
         <p:spPr>
           <a:xfrm>
-            <a:off x="6858000" y="4334256"/>
+            <a:off x="6858000" y="4709160"/>
             <a:ext cx="4663440" cy="274320"/>
           </a:xfrm>
           <a:prstGeom prst="rect">
@@ -11351,7 +11351,7 @@
         </p:nvSpPr>
         <p:spPr>
           <a:xfrm>
-            <a:off x="6858000" y="4608576"/>
+            <a:off x="6858000" y="4983480"/>
             <a:ext cx="4663440" cy="411480"/>
           </a:xfrm>
           <a:prstGeom prst="rect">
@@ -11393,7 +11393,7 @@
         </p:nvSpPr>
         <p:spPr>
           <a:xfrm>
-            <a:off x="640080" y="5440680"/>
+            <a:off x="640080" y="5623560"/>
             <a:ext cx="10881360" cy="640080"/>
           </a:xfrm>
           <a:prstGeom prst="rect">
@@ -12949,7 +12949,7 @@
         </p:nvSpPr>
         <p:spPr>
           <a:xfrm>
-            <a:off x="914400" y="2176272"/>
+            <a:off x="914400" y="1956816"/>
             <a:ext cx="219456" cy="219456"/>
           </a:xfrm>
           <a:prstGeom prst="rect">
@@ -13072,7 +13072,7 @@
         </p:nvSpPr>
         <p:spPr>
           <a:xfrm>
-            <a:off x="914400" y="3383280"/>
+            <a:off x="914400" y="3163824"/>
             <a:ext cx="219456" cy="219456"/>
           </a:xfrm>
           <a:prstGeom prst="rect">
@@ -13195,7 +13195,7 @@
         </p:nvSpPr>
         <p:spPr>
           <a:xfrm>
-            <a:off x="914400" y="4590288"/>
+            <a:off x="914400" y="4370832"/>
             <a:ext cx="219456" cy="219456"/>
           </a:xfrm>
           <a:prstGeom prst="rect">
@@ -14248,7 +14248,7 @@
                 <a:gridCol w="960120"/>
                 <a:gridCol w="960120"/>
               </a:tblGrid>
-              <a:tr h="329184">
+              <a:tr h="457200">
                 <a:tc>
                   <a:txBody>
                     <a:bodyPr/>
@@ -14590,7 +14590,7 @@
                   </a:tcPr>
                 </a:tc>
               </a:tr>
-              <a:tr h="329184">
+              <a:tr h="457200">
                 <a:tc>
                   <a:txBody>
                     <a:bodyPr/>
@@ -14932,7 +14932,7 @@
                   </a:tcPr>
                 </a:tc>
               </a:tr>
-              <a:tr h="329184">
+              <a:tr h="457200">
                 <a:tc>
                   <a:txBody>
                     <a:bodyPr/>
@@ -15274,7 +15274,7 @@
                   </a:tcPr>
                 </a:tc>
               </a:tr>
-              <a:tr h="329184">
+              <a:tr h="457200">
                 <a:tc>
                   <a:txBody>
                     <a:bodyPr/>
@@ -15616,7 +15616,7 @@
                   </a:tcPr>
                 </a:tc>
               </a:tr>
-              <a:tr h="329184">
+              <a:tr h="457200">
                 <a:tc>
                   <a:txBody>
                     <a:bodyPr/>
@@ -15958,7 +15958,7 @@
                   </a:tcPr>
                 </a:tc>
               </a:tr>
-              <a:tr h="329184">
+              <a:tr h="457200">
                 <a:tc>
                   <a:txBody>
                     <a:bodyPr/>
@@ -16300,7 +16300,7 @@
                   </a:tcPr>
                 </a:tc>
               </a:tr>
-              <a:tr h="329184">
+              <a:tr h="457200">
                 <a:tc>
                   <a:txBody>
                     <a:bodyPr/>
@@ -16654,8 +16654,8 @@
         </p:nvSpPr>
         <p:spPr>
           <a:xfrm>
-            <a:off x="6949440" y="1783080"/>
-            <a:ext cx="4572000" cy="2743200"/>
+            <a:off x="6949440" y="1828800"/>
+            <a:ext cx="4572000" cy="3108960"/>
           </a:xfrm>
           <a:prstGeom prst="rect">
             <a:avLst/>
@@ -16678,7 +16678,7 @@
               <a:buChar char="•"/>
             </a:pPr>
             <a:r>
-              <a:rPr lang="en-US" sz="1350" dirty="0">
+              <a:rPr lang="en-US" sz="1450" dirty="0">
                 <a:solidFill>
                   <a:srgbClr val="1B2A41"/>
                 </a:solidFill>
@@ -16688,7 +16688,7 @@
               </a:rPr>
               <a:t>Cuckoo Sandbox traces become a 16 x 16 API tile; packet captures become a 28 x 28 network tile.</a:t>
             </a:r>
-            <a:endParaRPr lang="en-US" sz="1350" dirty="0"/>
+            <a:endParaRPr lang="en-US" sz="1450" dirty="0"/>
           </a:p>
           <a:p>
             <a:pPr marL="342900" indent="-342900">
@@ -16702,7 +16702,7 @@
               <a:buChar char="•"/>
             </a:pPr>
             <a:r>
-              <a:rPr lang="en-US" sz="1350" dirty="0">
+              <a:rPr lang="en-US" sz="1450" dirty="0">
                 <a:solidFill>
                   <a:srgbClr val="1B2A41"/>
                 </a:solidFill>
@@ -16712,7 +16712,7 @@
               </a:rPr>
               <a:t>Only the largest-payload session per sample is kept, to limit sample-level leakage.</a:t>
             </a:r>
-            <a:endParaRPr lang="en-US" sz="1350" dirty="0"/>
+            <a:endParaRPr lang="en-US" sz="1450" dirty="0"/>
           </a:p>
           <a:p>
             <a:pPr marL="342900" indent="-342900">
@@ -16723,7 +16723,7 @@
               <a:buChar char="•"/>
             </a:pPr>
             <a:r>
-              <a:rPr lang="en-US" sz="1350" dirty="0">
+              <a:rPr lang="en-US" sz="1450" dirty="0">
                 <a:solidFill>
                   <a:srgbClr val="1B2A41"/>
                 </a:solidFill>
@@ -16733,7 +16733,7 @@
               </a:rPr>
               <a:t>Stratified by family and re-drawn for every seed, so the seeds do not share a test set.</a:t>
             </a:r>
-            <a:endParaRPr lang="en-US" sz="1350" dirty="0"/>
+            <a:endParaRPr lang="en-US" sz="1450" dirty="0"/>
           </a:p>
         </p:txBody>
       </p:sp>
@@ -16745,7 +16745,7 @@
         </p:nvSpPr>
         <p:spPr>
           <a:xfrm>
-            <a:off x="640080" y="4572000"/>
+            <a:off x="640080" y="5303520"/>
             <a:ext cx="10881360" cy="640080"/>
           </a:xfrm>
           <a:prstGeom prst="rect">
@@ -17728,7 +17728,7 @@
                 <a:gridCol w="1325880"/>
                 <a:gridCol w="1325880"/>
               </a:tblGrid>
-              <a:tr h="329184">
+              <a:tr h="457200">
                 <a:tc>
                   <a:txBody>
                     <a:bodyPr/>
@@ -18002,7 +18002,7 @@
                   </a:tcPr>
                 </a:tc>
               </a:tr>
-              <a:tr h="329184">
+              <a:tr h="457200">
                 <a:tc>
                   <a:txBody>
                     <a:bodyPr/>
@@ -18276,7 +18276,7 @@
                   </a:tcPr>
                 </a:tc>
               </a:tr>
-              <a:tr h="329184">
+              <a:tr h="457200">
                 <a:tc>
                   <a:txBody>
                     <a:bodyPr/>
@@ -18550,7 +18550,7 @@
                   </a:tcPr>
                 </a:tc>
               </a:tr>
-              <a:tr h="329184">
+              <a:tr h="457200">
                 <a:tc>
                   <a:txBody>
                     <a:bodyPr/>
@@ -18824,7 +18824,7 @@
                   </a:tcPr>
                 </a:tc>
               </a:tr>
-              <a:tr h="329184">
+              <a:tr h="457200">
                 <a:tc>
                   <a:txBody>
                     <a:bodyPr/>
@@ -19098,7 +19098,7 @@
                   </a:tcPr>
                 </a:tc>
               </a:tr>
-              <a:tr h="329184">
+              <a:tr h="457200">
                 <a:tc>
                   <a:txBody>
                     <a:bodyPr/>
@@ -19372,7 +19372,7 @@
                   </a:tcPr>
                 </a:tc>
               </a:tr>
-              <a:tr h="329184">
+              <a:tr h="457200">
                 <a:tc>
                   <a:txBody>
                     <a:bodyPr/>
@@ -19659,11 +19659,11 @@
         <p:spPr>
           <a:xfrm>
             <a:off x="7635240" y="1783080"/>
-            <a:ext cx="3886200" cy="2286000"/>
+            <a:ext cx="3886200" cy="3200400"/>
           </a:xfrm>
           <a:prstGeom prst="roundRect">
             <a:avLst>
-              <a:gd name="adj" fmla="val 2400"/>
+              <a:gd name="adj" fmla="val 1714"/>
             </a:avLst>
           </a:prstGeom>
           <a:solidFill>
@@ -19680,7 +19680,7 @@
         </p:nvSpPr>
         <p:spPr>
           <a:xfrm>
-            <a:off x="7909560" y="1947672"/>
+            <a:off x="7909560" y="2011680"/>
             <a:ext cx="3337560" cy="274320"/>
           </a:xfrm>
           <a:prstGeom prst="rect">
@@ -19719,7 +19719,7 @@
         </p:nvSpPr>
         <p:spPr>
           <a:xfrm>
-            <a:off x="7909560" y="2304288"/>
+            <a:off x="7909560" y="2514600"/>
             <a:ext cx="1234440" cy="274320"/>
           </a:xfrm>
           <a:prstGeom prst="rect">
@@ -19758,7 +19758,7 @@
         </p:nvSpPr>
         <p:spPr>
           <a:xfrm>
-            <a:off x="9189720" y="2304288"/>
+            <a:off x="9189720" y="2514600"/>
             <a:ext cx="2103120" cy="502920"/>
           </a:xfrm>
           <a:prstGeom prst="rect">
@@ -19800,7 +19800,7 @@
         </p:nvSpPr>
         <p:spPr>
           <a:xfrm>
-            <a:off x="7909560" y="2852928"/>
+            <a:off x="7909560" y="3264408"/>
             <a:ext cx="1234440" cy="274320"/>
           </a:xfrm>
           <a:prstGeom prst="rect">
@@ -19839,7 +19839,7 @@
         </p:nvSpPr>
         <p:spPr>
           <a:xfrm>
-            <a:off x="9189720" y="2852928"/>
+            <a:off x="9189720" y="3264408"/>
             <a:ext cx="2103120" cy="502920"/>
           </a:xfrm>
           <a:prstGeom prst="rect">
@@ -19881,7 +19881,7 @@
         </p:nvSpPr>
         <p:spPr>
           <a:xfrm>
-            <a:off x="7909560" y="3401568"/>
+            <a:off x="7909560" y="4014216"/>
             <a:ext cx="1234440" cy="274320"/>
           </a:xfrm>
           <a:prstGeom prst="rect">
@@ -19920,7 +19920,7 @@
         </p:nvSpPr>
         <p:spPr>
           <a:xfrm>
-            <a:off x="9189720" y="3401568"/>
+            <a:off x="9189720" y="4014216"/>
             <a:ext cx="2103120" cy="502920"/>
           </a:xfrm>
           <a:prstGeom prst="rect">
@@ -19962,7 +19962,7 @@
         </p:nvSpPr>
         <p:spPr>
           <a:xfrm>
-            <a:off x="640080" y="4434840"/>
+            <a:off x="640080" y="5303520"/>
             <a:ext cx="10881360" cy="640080"/>
           </a:xfrm>
           <a:prstGeom prst="rect">
@@ -20960,11 +20960,11 @@
         <p:spPr>
           <a:xfrm>
             <a:off x="640080" y="1783080"/>
-            <a:ext cx="7132320" cy="868680"/>
+            <a:ext cx="7132320" cy="987552"/>
           </a:xfrm>
           <a:prstGeom prst="roundRect">
             <a:avLst>
-              <a:gd name="adj" fmla="val 6316"/>
+              <a:gd name="adj" fmla="val 5556"/>
             </a:avLst>
           </a:prstGeom>
           <a:solidFill>
@@ -20981,7 +20981,7 @@
         </p:nvSpPr>
         <p:spPr>
           <a:xfrm>
-            <a:off x="914400" y="2107692"/>
+            <a:off x="914400" y="1956816"/>
             <a:ext cx="219456" cy="219456"/>
           </a:xfrm>
           <a:prstGeom prst="rect">
@@ -21002,7 +21002,7 @@
         <p:spPr>
           <a:xfrm>
             <a:off x="1325880" y="1947672"/>
-            <a:ext cx="1737360" cy="594360"/>
+            <a:ext cx="1737360" cy="713232"/>
           </a:xfrm>
           <a:prstGeom prst="rect">
             <a:avLst/>
@@ -21041,7 +21041,7 @@
         <p:spPr>
           <a:xfrm>
             <a:off x="3291840" y="1947672"/>
-            <a:ext cx="4251960" cy="594360"/>
+            <a:ext cx="4251960" cy="713232"/>
           </a:xfrm>
           <a:prstGeom prst="rect">
             <a:avLst/>
@@ -21082,12 +21082,12 @@
         </p:nvSpPr>
         <p:spPr>
           <a:xfrm>
-            <a:off x="640080" y="2834640"/>
-            <a:ext cx="7132320" cy="868680"/>
+            <a:off x="640080" y="2953512"/>
+            <a:ext cx="7132320" cy="987552"/>
           </a:xfrm>
           <a:prstGeom prst="roundRect">
             <a:avLst>
-              <a:gd name="adj" fmla="val 6316"/>
+              <a:gd name="adj" fmla="val 5556"/>
             </a:avLst>
           </a:prstGeom>
           <a:solidFill>
@@ -21104,7 +21104,7 @@
         </p:nvSpPr>
         <p:spPr>
           <a:xfrm>
-            <a:off x="914400" y="3159252"/>
+            <a:off x="914400" y="3127248"/>
             <a:ext cx="219456" cy="219456"/>
           </a:xfrm>
           <a:prstGeom prst="rect">
@@ -21124,8 +21124,8 @@
         </p:nvSpPr>
         <p:spPr>
           <a:xfrm>
-            <a:off x="1325880" y="2999232"/>
-            <a:ext cx="1737360" cy="594360"/>
+            <a:off x="1325880" y="3118104"/>
+            <a:ext cx="1737360" cy="713232"/>
           </a:xfrm>
           <a:prstGeom prst="rect">
             <a:avLst/>
@@ -21163,8 +21163,8 @@
         </p:nvSpPr>
         <p:spPr>
           <a:xfrm>
-            <a:off x="3291840" y="2999232"/>
-            <a:ext cx="4251960" cy="594360"/>
+            <a:off x="3291840" y="3118104"/>
+            <a:ext cx="4251960" cy="713232"/>
           </a:xfrm>
           <a:prstGeom prst="rect">
             <a:avLst/>
@@ -21205,12 +21205,12 @@
         </p:nvSpPr>
         <p:spPr>
           <a:xfrm>
-            <a:off x="640080" y="3886200"/>
-            <a:ext cx="7132320" cy="868680"/>
+            <a:off x="640080" y="4123944"/>
+            <a:ext cx="7132320" cy="987552"/>
           </a:xfrm>
           <a:prstGeom prst="roundRect">
             <a:avLst>
-              <a:gd name="adj" fmla="val 6316"/>
+              <a:gd name="adj" fmla="val 5556"/>
             </a:avLst>
           </a:prstGeom>
           <a:solidFill>
@@ -21227,7 +21227,7 @@
         </p:nvSpPr>
         <p:spPr>
           <a:xfrm>
-            <a:off x="914400" y="4210812"/>
+            <a:off x="914400" y="4297680"/>
             <a:ext cx="219456" cy="219456"/>
           </a:xfrm>
           <a:prstGeom prst="rect">
@@ -21247,8 +21247,8 @@
         </p:nvSpPr>
         <p:spPr>
           <a:xfrm>
-            <a:off x="1325880" y="4050792"/>
-            <a:ext cx="1737360" cy="594360"/>
+            <a:off x="1325880" y="4288536"/>
+            <a:ext cx="1737360" cy="713232"/>
           </a:xfrm>
           <a:prstGeom prst="rect">
             <a:avLst/>
@@ -21286,8 +21286,8 @@
         </p:nvSpPr>
         <p:spPr>
           <a:xfrm>
-            <a:off x="3291840" y="4050792"/>
-            <a:ext cx="4251960" cy="594360"/>
+            <a:off x="3291840" y="4288536"/>
+            <a:ext cx="4251960" cy="713232"/>
           </a:xfrm>
           <a:prstGeom prst="rect">
             <a:avLst/>
@@ -21329,11 +21329,11 @@
         <p:spPr>
           <a:xfrm>
             <a:off x="8092440" y="1783080"/>
-            <a:ext cx="3429000" cy="3063240"/>
+            <a:ext cx="3429000" cy="3511296"/>
           </a:xfrm>
           <a:prstGeom prst="roundRect">
             <a:avLst>
-              <a:gd name="adj" fmla="val 1791"/>
+              <a:gd name="adj" fmla="val 1600"/>
             </a:avLst>
           </a:prstGeom>
           <a:solidFill>
@@ -21350,7 +21350,7 @@
         </p:nvSpPr>
         <p:spPr>
           <a:xfrm>
-            <a:off x="8366760" y="1965960"/>
+            <a:off x="8366760" y="2011680"/>
             <a:ext cx="2880360" cy="274320"/>
           </a:xfrm>
           <a:prstGeom prst="rect">
@@ -21389,7 +21389,7 @@
         </p:nvSpPr>
         <p:spPr>
           <a:xfrm>
-            <a:off x="8366760" y="2331720"/>
+            <a:off x="8366760" y="2395728"/>
             <a:ext cx="2880360" cy="1188720"/>
           </a:xfrm>
           <a:prstGeom prst="rect">
@@ -21431,8 +21431,8 @@
         </p:nvSpPr>
         <p:spPr>
           <a:xfrm>
-            <a:off x="8366760" y="3611880"/>
-            <a:ext cx="2880360" cy="1005840"/>
+            <a:off x="8366760" y="3794760"/>
+            <a:ext cx="2880360" cy="1097280"/>
           </a:xfrm>
           <a:prstGeom prst="rect">
             <a:avLst/>
@@ -21473,7 +21473,7 @@
         </p:nvSpPr>
         <p:spPr>
           <a:xfrm>
-            <a:off x="640080" y="5120640"/>
+            <a:off x="640080" y="5532120"/>
             <a:ext cx="10881360" cy="640080"/>
           </a:xfrm>
           <a:prstGeom prst="rect">
